--- a/seguridad/Molina_De Haro_Alejandro_activitat1RA3 (2).pptx
+++ b/seguridad/Molina_De Haro_Alejandro_activitat1RA3 (2).pptx
@@ -320,7 +320,7 @@
           <a:p>
             <a:fld id="{5BCAD085-E8A6-8845-BD4E-CB4CCA059FC4}" type="datetimeFigureOut">
               <a:rPr lang="en-US" smtClean="0"/>
-              <a:t>3/4/2026</a:t>
+              <a:t>3/27/2026</a:t>
             </a:fld>
             <a:endParaRPr lang="en-US"/>
           </a:p>
@@ -595,7 +595,7 @@
           <a:p>
             <a:fld id="{5BCAD085-E8A6-8845-BD4E-CB4CCA059FC4}" type="datetimeFigureOut">
               <a:rPr lang="en-US" smtClean="0"/>
-              <a:t>3/4/2026</a:t>
+              <a:t>3/27/2026</a:t>
             </a:fld>
             <a:endParaRPr lang="en-US"/>
           </a:p>
@@ -789,7 +789,7 @@
           <a:p>
             <a:fld id="{5BCAD085-E8A6-8845-BD4E-CB4CCA059FC4}" type="datetimeFigureOut">
               <a:rPr lang="en-US" smtClean="0"/>
-              <a:t>3/4/2026</a:t>
+              <a:t>3/27/2026</a:t>
             </a:fld>
             <a:endParaRPr lang="en-US"/>
           </a:p>
@@ -1062,7 +1062,7 @@
           <a:p>
             <a:fld id="{5BCAD085-E8A6-8845-BD4E-CB4CCA059FC4}" type="datetimeFigureOut">
               <a:rPr lang="en-US" smtClean="0"/>
-              <a:t>3/4/2026</a:t>
+              <a:t>3/27/2026</a:t>
             </a:fld>
             <a:endParaRPr lang="en-US"/>
           </a:p>
@@ -1403,7 +1403,7 @@
           <a:p>
             <a:fld id="{5BCAD085-E8A6-8845-BD4E-CB4CCA059FC4}" type="datetimeFigureOut">
               <a:rPr lang="en-US" smtClean="0"/>
-              <a:t>3/4/2026</a:t>
+              <a:t>3/27/2026</a:t>
             </a:fld>
             <a:endParaRPr lang="en-US"/>
           </a:p>
@@ -2026,7 +2026,7 @@
           <a:p>
             <a:fld id="{5BCAD085-E8A6-8845-BD4E-CB4CCA059FC4}" type="datetimeFigureOut">
               <a:rPr lang="en-US" smtClean="0"/>
-              <a:t>3/4/2026</a:t>
+              <a:t>3/27/2026</a:t>
             </a:fld>
             <a:endParaRPr lang="en-US"/>
           </a:p>
@@ -2886,7 +2886,7 @@
           <a:p>
             <a:fld id="{5BCAD085-E8A6-8845-BD4E-CB4CCA059FC4}" type="datetimeFigureOut">
               <a:rPr lang="en-US" smtClean="0"/>
-              <a:t>3/4/2026</a:t>
+              <a:t>3/27/2026</a:t>
             </a:fld>
             <a:endParaRPr lang="en-US"/>
           </a:p>
@@ -3056,7 +3056,7 @@
           <a:p>
             <a:fld id="{5BCAD085-E8A6-8845-BD4E-CB4CCA059FC4}" type="datetimeFigureOut">
               <a:rPr lang="en-US" smtClean="0"/>
-              <a:t>3/4/2026</a:t>
+              <a:t>3/27/2026</a:t>
             </a:fld>
             <a:endParaRPr lang="en-US"/>
           </a:p>
@@ -3236,7 +3236,7 @@
           <a:p>
             <a:fld id="{5BCAD085-E8A6-8845-BD4E-CB4CCA059FC4}" type="datetimeFigureOut">
               <a:rPr lang="en-US" smtClean="0"/>
-              <a:t>3/4/2026</a:t>
+              <a:t>3/27/2026</a:t>
             </a:fld>
             <a:endParaRPr lang="en-US"/>
           </a:p>
@@ -3406,7 +3406,7 @@
           <a:p>
             <a:fld id="{5BCAD085-E8A6-8845-BD4E-CB4CCA059FC4}" type="datetimeFigureOut">
               <a:rPr lang="en-US" smtClean="0"/>
-              <a:t>3/4/2026</a:t>
+              <a:t>3/27/2026</a:t>
             </a:fld>
             <a:endParaRPr lang="en-US"/>
           </a:p>
@@ -3653,7 +3653,7 @@
           <a:p>
             <a:fld id="{5BCAD085-E8A6-8845-BD4E-CB4CCA059FC4}" type="datetimeFigureOut">
               <a:rPr lang="en-US" smtClean="0"/>
-              <a:t>3/4/2026</a:t>
+              <a:t>3/27/2026</a:t>
             </a:fld>
             <a:endParaRPr lang="en-US"/>
           </a:p>
@@ -3945,7 +3945,7 @@
           <a:p>
             <a:fld id="{5BCAD085-E8A6-8845-BD4E-CB4CCA059FC4}" type="datetimeFigureOut">
               <a:rPr lang="en-US" smtClean="0"/>
-              <a:t>3/4/2026</a:t>
+              <a:t>3/27/2026</a:t>
             </a:fld>
             <a:endParaRPr lang="en-US"/>
           </a:p>
@@ -4389,7 +4389,7 @@
           <a:p>
             <a:fld id="{5BCAD085-E8A6-8845-BD4E-CB4CCA059FC4}" type="datetimeFigureOut">
               <a:rPr lang="en-US" smtClean="0"/>
-              <a:t>3/4/2026</a:t>
+              <a:t>3/27/2026</a:t>
             </a:fld>
             <a:endParaRPr lang="en-US"/>
           </a:p>
@@ -4507,7 +4507,7 @@
           <a:p>
             <a:fld id="{5BCAD085-E8A6-8845-BD4E-CB4CCA059FC4}" type="datetimeFigureOut">
               <a:rPr lang="en-US" smtClean="0"/>
-              <a:t>3/4/2026</a:t>
+              <a:t>3/27/2026</a:t>
             </a:fld>
             <a:endParaRPr lang="en-US"/>
           </a:p>
@@ -4602,7 +4602,7 @@
           <a:p>
             <a:fld id="{5BCAD085-E8A6-8845-BD4E-CB4CCA059FC4}" type="datetimeFigureOut">
               <a:rPr lang="en-US" smtClean="0"/>
-              <a:t>3/4/2026</a:t>
+              <a:t>3/27/2026</a:t>
             </a:fld>
             <a:endParaRPr lang="en-US"/>
           </a:p>
@@ -4881,7 +4881,7 @@
           <a:p>
             <a:fld id="{5BCAD085-E8A6-8845-BD4E-CB4CCA059FC4}" type="datetimeFigureOut">
               <a:rPr lang="en-US" smtClean="0"/>
-              <a:t>3/4/2026</a:t>
+              <a:t>3/27/2026</a:t>
             </a:fld>
             <a:endParaRPr lang="en-US"/>
           </a:p>
@@ -5156,7 +5156,7 @@
           <a:p>
             <a:fld id="{5BCAD085-E8A6-8845-BD4E-CB4CCA059FC4}" type="datetimeFigureOut">
               <a:rPr lang="en-US" smtClean="0"/>
-              <a:t>3/4/2026</a:t>
+              <a:t>3/27/2026</a:t>
             </a:fld>
             <a:endParaRPr lang="en-US"/>
           </a:p>
@@ -5721,7 +5721,7 @@
           <a:p>
             <a:fld id="{5BCAD085-E8A6-8845-BD4E-CB4CCA059FC4}" type="datetimeFigureOut">
               <a:rPr lang="en-US" smtClean="0"/>
-              <a:t>3/4/2026</a:t>
+              <a:t>3/27/2026</a:t>
             </a:fld>
             <a:endParaRPr lang="en-US"/>
           </a:p>
@@ -6290,67 +6290,12 @@
           <a:bodyPr/>
           <a:lstStyle/>
           <a:p>
-            <a:r>
-              <a:rPr dirty="0" err="1"/>
-              <a:t>Módulo</a:t>
-            </a:r>
-            <a:r>
-              <a:rPr dirty="0"/>
-              <a:t>: </a:t>
-            </a:r>
-            <a:r>
-              <a:rPr dirty="0" err="1"/>
-              <a:t>Seguridad</a:t>
-            </a:r>
-            <a:r>
-              <a:rPr dirty="0"/>
-              <a:t> </a:t>
-            </a:r>
-            <a:r>
-              <a:rPr dirty="0" err="1"/>
-              <a:t>Informática</a:t>
-            </a:r>
-            <a:r>
-              <a:rPr dirty="0"/>
-              <a:t> – 2º SMIX</a:t>
-            </a:r>
+            <a:pPr marL="0" indent="0">
+              <a:buNone/>
+            </a:pPr>
             <a:r>
               <a:rPr lang="es-ES" dirty="0"/>
-              <a:t>				</a:t>
-            </a:r>
-            <a:endParaRPr dirty="0"/>
-          </a:p>
-          <a:p>
-            <a:pPr lvl="1"/>
-            <a:r>
-              <a:rPr dirty="0" err="1"/>
-              <a:t>Análisis</a:t>
-            </a:r>
-            <a:r>
-              <a:rPr dirty="0"/>
-              <a:t> y </a:t>
-            </a:r>
-            <a:r>
-              <a:rPr dirty="0" err="1"/>
-              <a:t>propuesta</a:t>
-            </a:r>
-            <a:r>
-              <a:rPr dirty="0"/>
-              <a:t> de </a:t>
-            </a:r>
-            <a:r>
-              <a:rPr dirty="0" err="1"/>
-              <a:t>solución</a:t>
-            </a:r>
-            <a:endParaRPr lang="es-ES" dirty="0"/>
-          </a:p>
-          <a:p>
-            <a:pPr marL="457207" lvl="1" indent="0">
-              <a:buNone/>
-            </a:pPr>
-            <a:r>
-              <a:rPr lang="es-ES" dirty="0"/>
-              <a:t>																																																																			Alejandro Molina De Haro</a:t>
+              <a:t>																																													Alejandro Molina De Haro</a:t>
             </a:r>
             <a:endParaRPr dirty="0"/>
           </a:p>
